--- a/Causal_Inference_Case_Study.pptx
+++ b/Causal_Inference_Case_Study.pptx
@@ -1428,7 +1428,7 @@
         <p:spPr>
           <a:xfrm>
             <a:off x="731520" y="2743200"/>
-            <a:ext cx="6400800" cy="548640"/>
+            <a:ext cx="5742432" cy="548640"/>
           </a:xfrm>
           <a:prstGeom prst="rect">
             <a:avLst/>
@@ -2655,8 +2655,8 @@
         </p:blipFill>
         <p:spPr>
           <a:xfrm>
-            <a:off x="20" y="10"/>
-            <a:ext cx="8896993" cy="5143490"/>
+            <a:off x="20" y="530577"/>
+            <a:ext cx="9031091" cy="4075289"/>
           </a:xfrm>
           <a:custGeom>
             <a:avLst/>
@@ -6139,7 +6139,7 @@
                 <a:ea typeface="Calibri" pitchFamily="34" charset="-122"/>
                 <a:cs typeface="Calibri" pitchFamily="34" charset="-120"/>
               </a:rPr>
-              <a:t>Ella Ndala</a:t>
+              <a:t>Ella Ndalla</a:t>
             </a:r>
             <a:endParaRPr lang="en-US" sz="2200" dirty="0"/>
           </a:p>

--- a/Causal_Inference_Case_Study.pptx
+++ b/Causal_Inference_Case_Study.pptx
@@ -1663,7 +1663,7 @@
                 <a:ea typeface="Georgia" pitchFamily="34" charset="-122"/>
                 <a:cs typeface="Georgia" pitchFamily="34" charset="-120"/>
               </a:rPr>
-              <a:t>100.2%</a:t>
+              <a:t>101.3%</a:t>
             </a:r>
             <a:endParaRPr lang="en-US" sz="4800" dirty="0"/>
           </a:p>
@@ -1792,7 +1792,7 @@
                 <a:ea typeface="Georgia" pitchFamily="34" charset="-122"/>
                 <a:cs typeface="Georgia" pitchFamily="34" charset="-120"/>
               </a:rPr>
-              <a:t>62.3%</a:t>
+              <a:t>94.5%</a:t>
             </a:r>
             <a:endParaRPr lang="en-US" sz="4800" dirty="0"/>
           </a:p>
@@ -1921,7 +1921,7 @@
                 <a:ea typeface="Georgia" pitchFamily="34" charset="-122"/>
                 <a:cs typeface="Georgia" pitchFamily="34" charset="-120"/>
               </a:rPr>
-              <a:t>0.51</a:t>
+              <a:t>0.45</a:t>
             </a:r>
             <a:endParaRPr lang="en-US" sz="4800" dirty="0"/>
           </a:p>
@@ -2077,7 +2077,7 @@
                 <a:ea typeface="Calibri" pitchFamily="34" charset="-122"/>
                 <a:cs typeface="Calibri" pitchFamily="34" charset="-120"/>
               </a:rPr>
-              <a:t>activity — Fully Mediated</a:t>
+              <a:t>age_group — Fully Mediated</a:t>
             </a:r>
             <a:endParaRPr lang="en-US" sz="1300" dirty="0"/>
           </a:p>
@@ -2116,7 +2116,7 @@
                 <a:ea typeface="Calibri" pitchFamily="34" charset="-122"/>
                 <a:cs typeface="Calibri" pitchFamily="34" charset="-120"/>
               </a:rPr>
-              <a:t>100.2% of effect flows through mediators | Food: 52.9% | Service: 47.2% | Direct effect: +0.0015 (negligible) | Activity affects ratings almost entirely via food and service quality</a:t>
+              <a:t>101.3% of effect flows through mediators | Food: 55.0% | Service: 45.0% | Direct effect: −0.0014 | p = 0.0053 — the effect runs entirely through food and service quality</a:t>
             </a:r>
             <a:endParaRPr lang="en-US" sz="1100" dirty="0"/>
           </a:p>
@@ -2216,7 +2216,7 @@
                 <a:ea typeface="Calibri" pitchFamily="34" charset="-122"/>
                 <a:cs typeface="Calibri" pitchFamily="34" charset="-120"/>
               </a:rPr>
-              <a:t>personality — Food-Dominant</a:t>
+              <a:t>activity — Strongly Mediated</a:t>
             </a:r>
             <a:endParaRPr lang="en-US" sz="1300" dirty="0"/>
           </a:p>
@@ -2255,7 +2255,7 @@
                 <a:ea typeface="Calibri" pitchFamily="34" charset="-122"/>
                 <a:cs typeface="Calibri" pitchFamily="34" charset="-120"/>
               </a:rPr>
-              <a:t>72.6% total mediated | Food pathway: 75.2% | Service pathway: 24.8% | Direct effect: +0.026 | Personality type shapes food preferences, driving rating differences</a:t>
+              <a:t>87.6% total mediated | Food pathway: 60.3% | Service pathway: 39.7% | Direct effect: −0.032 | p = 0.0001 — the best-identified mediation result</a:t>
             </a:r>
             <a:endParaRPr lang="en-US" sz="1100" dirty="0"/>
           </a:p>
@@ -2355,7 +2355,7 @@
                 <a:ea typeface="Calibri" pitchFamily="34" charset="-122"/>
                 <a:cs typeface="Calibri" pitchFamily="34" charset="-120"/>
               </a:rPr>
-              <a:t>age_group — Service-Dominant</a:t>
+              <a:t>personality — Not Significant</a:t>
             </a:r>
             <a:endParaRPr lang="en-US" sz="1300" dirty="0"/>
           </a:p>
@@ -2394,7 +2394,7 @@
                 <a:ea typeface="Calibri" pitchFamily="34" charset="-122"/>
                 <a:cs typeface="Calibri" pitchFamily="34" charset="-120"/>
               </a:rPr>
-              <a:t>62.3% total mediated | Service pathway: 61.8% | Food pathway: 38.2% | Direct effect: −0.022 | Older/younger groups differ mainly in service expectations</a:t>
+              <a:t>Total effect +0.007, p = 0.7647 — indistinguishable from zero. Mediation ratios are unstable when the total effect is near zero, so none are reported.</a:t>
             </a:r>
             <a:endParaRPr lang="en-US" sz="1100" dirty="0"/>
           </a:p>
@@ -2494,7 +2494,7 @@
                 <a:ea typeface="Calibri" pitchFamily="34" charset="-122"/>
                 <a:cs typeface="Calibri" pitchFamily="34" charset="-120"/>
               </a:rPr>
-              <a:t>User_cuisine — Mostly Direct</a:t>
+              <a:t>User_cuisine — Not Significant</a:t>
             </a:r>
             <a:endParaRPr lang="en-US" sz="1300" dirty="0"/>
           </a:p>
@@ -2533,7 +2533,7 @@
                 <a:ea typeface="Calibri" pitchFamily="34" charset="-122"/>
                 <a:cs typeface="Calibri" pitchFamily="34" charset="-120"/>
               </a:rPr>
-              <a:t>Only 40.9% mediated | Indirect via food: 28.1% | Via service: 12.9% | Direct effect: −0.0014 | Cuisine preference has a largely direct impact on rating — not via food/service quality</a:t>
+              <a:t>Total effect +0.004, p = 0.1309 — not distinguishable from zero on 1,161 ratings.</a:t>
             </a:r>
             <a:endParaRPr lang="en-US" sz="1100" dirty="0"/>
           </a:p>
@@ -3236,7 +3236,7 @@
                 </a:solidFill>
                 <a:latin typeface="Calibri" pitchFamily="34" charset="0"/>
               </a:rPr>
-              <a:t>Note: </a:t>
+              <a:t>Note: Age group is fully mediated (101.3%, p = 0.005) and activity 87.6% mediated (p = 0.0001); personality (p = 0.76) and cuisine preference (p = 0.13) are not significant. These four treatments are carried over from the earlier graph — none is a node in the re-derived 14-node DAG, so they are reported for continuity, not as graph-identified effects.</a:t>
             </a:r>
             <a:r>
               <a:rPr lang="en-US" sz="900" dirty="0">
@@ -3245,7 +3245,7 @@
                 </a:solidFill>
                 <a:latin typeface="Calibri" pitchFamily="34" charset="0"/>
               </a:rPr>
-              <a:t>Effect decomposition via food and service quality mediators. Activity is fully mediated (100.2%); personality is food-dominant (75.2%); age group is service-dominant (61.8%); cuisine preference acts mostly directly (59.1%).</a:t>
+              <a:t/>
             </a:r>
           </a:p>
         </p:txBody>
@@ -3394,7 +3394,7 @@
                 <a:ea typeface="Georgia" pitchFamily="34" charset="-122"/>
                 <a:cs typeface="Georgia" pitchFamily="34" charset="-120"/>
               </a:rPr>
-              <a:t>+0.720</a:t>
+              <a:t>+0.361</a:t>
             </a:r>
             <a:endParaRPr lang="en-US" sz="4800" dirty="0"/>
           </a:p>
@@ -3618,7 +3618,7 @@
                 <a:ea typeface="Georgia" pitchFamily="34" charset="-122"/>
                 <a:cs typeface="Georgia" pitchFamily="34" charset="-120"/>
               </a:rPr>
-              <a:t>1.047</a:t>
+              <a:t>1.180</a:t>
             </a:r>
             <a:endParaRPr lang="en-US" sz="4800" dirty="0"/>
           </a:p>
@@ -3796,7 +3796,7 @@
                 <a:ea typeface="Calibri" pitchFamily="34" charset="-122"/>
                 <a:cs typeface="Calibri" pitchFamily="34" charset="-120"/>
               </a:rPr>
-              <a:t>IPW ATE: +0.720 (95% CI: [+0.627, +0.814]) | Adjusted ATE: +0.206 controlling for 8 confounders | Unadjusted: +0.723 (n=162 treated, 31,397 control) | Families rate restaurants significantly HIGHER</a:t>
+              <a:t>IPW ATE: +0.361 (95% CI: [+0.016, +0.658]) | Adjusted ATE: +0.149 (95% CI: [−0.050, +0.332]) — not significant | Unadjusted: +0.385 (n=19 treated, 1,142 control) | Only 19 treated observations</a:t>
             </a:r>
             <a:endParaRPr lang="en-US" sz="1100" dirty="0"/>
           </a:p>
@@ -3935,7 +3935,7 @@
                 <a:ea typeface="Calibri" pitchFamily="34" charset="-122"/>
                 <a:cs typeface="Calibri" pitchFamily="34" charset="-120"/>
               </a:rPr>
-              <a:t>Via Food: +0.506 (19.8%) | Via Service: +0.504 (19.8%) | Via Personality: +0.484 (19.0%) | Via Height: +0.473 (18.6%) | Via Color: +0.451 (17.7%) | Via Interest: +0.130 (5.1%)</a:t>
+              <a:t>Via Service: +0.199 (38.0%) | Via Food: +0.181 (34.6%) | Via Interest: +0.087 (16.6%) | Via Color: +0.031 (6.0%) | Via Height: +0.029 (5.6%) | Via Personality: −0.004 (−0.8%)</a:t>
             </a:r>
             <a:endParaRPr lang="en-US" sz="1100" dirty="0"/>
           </a:p>
@@ -4074,7 +4074,7 @@
                 <a:ea typeface="Calibri" pitchFamily="34" charset="-122"/>
                 <a:cs typeface="Calibri" pitchFamily="34" charset="-120"/>
               </a:rPr>
-              <a:t>Morning: ATE = +1.476 ★ strongest | Night: ATE = +0.803 | Evening: ATE = +0.803 | Afternoon: ATE = +0.758 | Full Day: ATE = +0.430 ★ weakest | Range: 1.047 rating points across segments</a:t>
+              <a:t>Morning: +0.955 (n=2, p=0.10) | Evening: +0.664 (n=7, p=0.026) ★ only significant subgroup | Full Day: +0.234 (n=5, p=0.51) | Afternoon: +0.222 (n=2, p=0.68) | Night: −0.226 (n=3, p=0.60) | Range: 1.180 points</a:t>
             </a:r>
             <a:endParaRPr lang="en-US" sz="1100" dirty="0"/>
           </a:p>
@@ -4174,7 +4174,7 @@
                 <a:ea typeface="Calibri" pitchFamily="34" charset="-122"/>
                 <a:cs typeface="Calibri" pitchFamily="34" charset="-120"/>
               </a:rPr>
-              <a:t>Business Recommendation</a:t>
+              <a:t>What This Can and Cannot Support</a:t>
             </a:r>
             <a:endParaRPr lang="en-US" sz="1300" dirty="0"/>
           </a:p>
@@ -4213,7 +4213,7 @@
                 <a:ea typeface="Calibri" pitchFamily="34" charset="-122"/>
                 <a:cs typeface="Calibri" pitchFamily="34" charset="-120"/>
               </a:rPr>
-              <a:t>Invest in family-friendly features for morning &amp; night windows. Priority: food quality (19.8%), service quality (19.8%), environment. Morning-opening restaurants gain most.</a:t>
+              <a:t>19 treated households split across five time windows (2–7 each) — only Evening reaches significance. The direction (families rate higher, mostly via service 38% and food 35%) is plausible but underpowered. The next step is a larger sample, not a business decision.</a:t>
             </a:r>
             <a:endParaRPr lang="en-US" sz="1100" dirty="0"/>
           </a:p>
@@ -4252,7 +4252,7 @@
                 <a:ea typeface="Calibri" pitchFamily="34" charset="-122"/>
                 <a:cs typeface="Calibri" pitchFamily="34" charset="-120"/>
               </a:rPr>
-              <a:t>Business Question: Why do families with children rate restaurants differently — and through which pathways?</a:t>
+              <a:t>Business Question: Why do families with children rate restaurants differently? — Note: hijos is not a node in the re-derived DAG (association with rating 0.133 on the corrected data, down from 0.703). Retained for continuity; not graph-identified.</a:t>
             </a:r>
             <a:endParaRPr lang="en-US" sz="1300" dirty="0"/>
           </a:p>
@@ -7756,7 +7756,7 @@
                 <a:ea typeface="Calibri" pitchFamily="34" charset="-122"/>
                 <a:cs typeface="Calibri" pitchFamily="34" charset="-120"/>
               </a:rPr>
-              <a:t>Merge patrons + restaurants on userID and placeID</a:t>
+              <a:t>Collapse one-to-many tables, then merge on userID and placeID</a:t>
             </a:r>
             <a:endParaRPr lang="en-US" sz="1100" dirty="0"/>
           </a:p>
@@ -7986,7 +7986,7 @@
                 <a:ea typeface="Calibri" pitchFamily="34" charset="-122"/>
                 <a:cs typeface="Calibri" pitchFamily="34" charset="-120"/>
               </a:rPr>
-              <a:t>Output: final_data.pkl — 31,559 rows × 52 features</a:t>
+              <a:t>Output: final_data.pkl — 1,161 rows × 52 features (one per rating)</a:t>
             </a:r>
             <a:endParaRPr lang="en-US" sz="1100" dirty="0"/>
           </a:p>
@@ -9325,7 +9325,7 @@
                 <a:ea typeface="Calibri" pitchFamily="34" charset="-122"/>
                 <a:cs typeface="Calibri" pitchFamily="34" charset="-120"/>
               </a:rPr>
-              <a:t>Statistical associations flagged by ydata-profiling EDA — reviewed, directed, and encoded as 78 causal edges</a:t>
+              <a:t>Associations flagged by ydata-profiling on the CORRECTED 1,161-row table — bias-corrected, layered, and encoded as 16 causal edges</a:t>
             </a:r>
             <a:endParaRPr lang="en-US" sz="1300" dirty="0"/>
           </a:p>
@@ -9477,7 +9477,7 @@
                 <a:ea typeface="Calibri" pitchFamily="34" charset="-122"/>
                 <a:cs typeface="Calibri" pitchFamily="34" charset="-120"/>
               </a:rPr>
-              <a:t>ydata-profiling scanned 50+ merged features across patron and restaurant dataset</a:t>
+              <a:t>ydata-profiling re-run on the corrected table; alerts now name food_rating and service_rating against rating, and nothing else</a:t>
             </a:r>
             <a:endParaRPr lang="en-US" sz="1100" dirty="0"/>
           </a:p>
@@ -9574,7 +9574,7 @@
                 <a:ea typeface="Calibri" pitchFamily="34" charset="-122"/>
                 <a:cs typeface="Calibri" pitchFamily="34" charset="-120"/>
               </a:rPr>
-              <a:t>Each flagged pair reviewed for domain validity and causal plausibility</a:t>
+              <a:t>Bias-corrected Cramér's V (Bergsma) + cardinality guard, so collapsed set-columns cannot become spurious hubs</a:t>
             </a:r>
             <a:endParaRPr lang="en-US" sz="1100" dirty="0"/>
           </a:p>
@@ -9592,7 +9592,7 @@
                 <a:ea typeface="Calibri" pitchFamily="34" charset="-122"/>
                 <a:cs typeface="Calibri" pitchFamily="34" charset="-120"/>
               </a:rPr>
-              <a:t>Direction: demographics → preferences → rating</a:t>
+              <a:t>Direction by fixed layering: exogenous → dyadic → mediators → rating; within-layer pairs omitted (selection, not causation)</a:t>
             </a:r>
             <a:endParaRPr lang="en-US" sz="1100" dirty="0"/>
           </a:p>
@@ -9671,7 +9671,7 @@
                 <a:ea typeface="Calibri" pitchFamily="34" charset="-122"/>
                 <a:cs typeface="Calibri" pitchFamily="34" charset="-120"/>
               </a:rPr>
-              <a:t>Validated pairs encoded as (cause, effect) tuples in correlation_edges list</a:t>
+              <a:t>Validated pairs encoded as (cause, effect) tuples in correlation_edges — see docs/edge_derivation.md</a:t>
             </a:r>
             <a:endParaRPr lang="en-US" sz="1100" dirty="0"/>
           </a:p>
@@ -9689,7 +9689,7 @@
                 <a:ea typeface="Calibri" pitchFamily="34" charset="-122"/>
                 <a:cs typeface="Calibri" pitchFamily="34" charset="-120"/>
               </a:rPr>
-              <a:t>78 edges passed to networkx DiGraph → causal graph construction</a:t>
+              <a:t>16 edges passed to networkx DiGraph → strict DAG, 0 cycles</a:t>
             </a:r>
             <a:endParaRPr lang="en-US" sz="1100" dirty="0"/>
           </a:p>
@@ -9801,7 +9801,7 @@
                 <a:ea typeface="Georgia" pitchFamily="34" charset="-122"/>
                 <a:cs typeface="Georgia" pitchFamily="34" charset="-120"/>
               </a:rPr>
-              <a:t>78</a:t>
+              <a:t>16</a:t>
             </a:r>
             <a:endParaRPr lang="en-US" sz="4800" dirty="0"/>
           </a:p>
@@ -9879,7 +9879,7 @@
                 <a:ea typeface="Georgia" pitchFamily="34" charset="-122"/>
                 <a:cs typeface="Georgia" pitchFamily="34" charset="-120"/>
               </a:rPr>
-              <a:t>31</a:t>
+              <a:t>14</a:t>
             </a:r>
             <a:endParaRPr lang="en-US" sz="4800" dirty="0"/>
           </a:p>
@@ -9957,7 +9957,7 @@
                 <a:ea typeface="Georgia" pitchFamily="34" charset="-122"/>
                 <a:cs typeface="Georgia" pitchFamily="34" charset="-120"/>
               </a:rPr>
-              <a:t>7</a:t>
+              <a:t>3</a:t>
             </a:r>
             <a:endParaRPr lang="en-US" sz="4800" dirty="0"/>
           </a:p>
@@ -10035,7 +10035,7 @@
                 <a:ea typeface="Georgia" pitchFamily="34" charset="-122"/>
                 <a:cs typeface="Georgia" pitchFamily="34" charset="-120"/>
               </a:rPr>
-              <a:t>53</a:t>
+              <a:t>0</a:t>
             </a:r>
             <a:endParaRPr lang="en-US" sz="4800" dirty="0"/>
           </a:p>
@@ -10074,7 +10074,7 @@
                 <a:ea typeface="Calibri" pitchFamily="34" charset="-122"/>
                 <a:cs typeface="Calibri" pitchFamily="34" charset="-120"/>
               </a:rPr>
-              <a:t>Cycles Detected</a:t>
+              <a:t>Cycles (strict DAG)</a:t>
             </a:r>
             <a:endParaRPr lang="en-US" sz="1100" dirty="0"/>
           </a:p>
@@ -10153,7 +10153,7 @@
                 <a:ea typeface="Calibri" pitchFamily="34" charset="-122"/>
                 <a:cs typeface="Calibri" pitchFamily="34" charset="-120"/>
               </a:rPr>
-              <a:t>color</a:t>
+              <a:t>food_rating, service_rating — the only edges clearing ydata's 0.50 alert level</a:t>
             </a:r>
             <a:r>
               <a:rPr lang="en-US" sz="1100" dirty="0">
@@ -10164,7 +10164,7 @@
                 <a:ea typeface="Calibri" pitchFamily="34" charset="-122"/>
                 <a:cs typeface="Calibri" pitchFamily="34" charset="-120"/>
               </a:rPr>
-              <a:t> — 8 incoming edges (most influenced)</a:t>
+              <a:t/>
             </a:r>
             <a:endParaRPr lang="en-US" sz="1100" dirty="0"/>
           </a:p>
@@ -10182,7 +10182,7 @@
                 <a:ea typeface="Calibri" pitchFamily="34" charset="-122"/>
                 <a:cs typeface="Calibri" pitchFamily="34" charset="-120"/>
               </a:rPr>
-              <a:t>height</a:t>
+              <a:t>Upayment, color, drink_level — 3 outgoing edges each (most influential)</a:t>
             </a:r>
             <a:r>
               <a:rPr lang="en-US" sz="1100" dirty="0">
@@ -10193,7 +10193,7 @@
                 <a:ea typeface="Calibri" pitchFamily="34" charset="-122"/>
                 <a:cs typeface="Calibri" pitchFamily="34" charset="-120"/>
               </a:rPr>
-              <a:t> — 8 outgoing edges (most influential)</a:t>
+              <a:t/>
             </a:r>
             <a:endParaRPr lang="en-US" sz="1100" dirty="0"/>
           </a:p>
@@ -10211,7 +10211,7 @@
                 <a:ea typeface="Calibri" pitchFamily="34" charset="-122"/>
                 <a:cs typeface="Calibri" pitchFamily="34" charset="-120"/>
               </a:rPr>
-              <a:t>restaurant_specialty</a:t>
+              <a:t>42 of 75 prior edges lost their justification on the corrected data</a:t>
             </a:r>
             <a:r>
               <a:rPr lang="en-US" sz="1100" dirty="0">
@@ -10222,7 +10222,7 @@
                 <a:ea typeface="Calibri" pitchFamily="34" charset="-122"/>
                 <a:cs typeface="Calibri" pitchFamily="34" charset="-120"/>
               </a:rPr>
-              <a:t> — 14 total connections (hub node)</a:t>
+              <a:t/>
             </a:r>
             <a:endParaRPr lang="en-US" sz="1100" dirty="0"/>
           </a:p>
@@ -10357,7 +10357,7 @@
                 <a:ea typeface="Calibri" pitchFamily="34" charset="-122"/>
                 <a:cs typeface="Calibri" pitchFamily="34" charset="-120"/>
               </a:rPr>
-              <a:t>31 nodes  ·  78 directed edges  ·  7 direct treatment variables  ·  53 cycles detected</a:t>
+              <a:t>14 nodes  ·  16 directed edges  ·  3 direct treatment variables  ·  0 cycles (strict DAG)</a:t>
             </a:r>
             <a:endParaRPr lang="en-US" sz="1000" dirty="0"/>
           </a:p>
@@ -10502,7 +10502,7 @@
                 <a:ea typeface="Georgia" pitchFamily="34" charset="-122"/>
                 <a:cs typeface="Georgia" pitchFamily="34" charset="-120"/>
               </a:rPr>
-              <a:t>82.84%</a:t>
+              <a:t>60.15%</a:t>
             </a:r>
             <a:endParaRPr lang="en-US" sz="4800" dirty="0"/>
           </a:p>
@@ -10726,7 +10726,7 @@
                 <a:ea typeface="Georgia" pitchFamily="34" charset="-122"/>
                 <a:cs typeface="Georgia" pitchFamily="34" charset="-120"/>
               </a:rPr>
-              <a:t>42.58%</a:t>
+              <a:t>54.71%</a:t>
             </a:r>
             <a:endParaRPr lang="en-US" sz="4800" dirty="0"/>
           </a:p>
@@ -10904,7 +10904,7 @@
                 <a:ea typeface="Calibri" pitchFamily="34" charset="-122"/>
                 <a:cs typeface="Calibri" pitchFamily="34" charset="-120"/>
               </a:rPr>
-              <a:t>42.58% relative importance | Direct effect: +0.3632 | Shapley: 33.66% | Largest single driver of overall rating</a:t>
+              <a:t>54.71% relative importance | Direct effect: +0.3597 | Shapley: 52.50% | Largest single driver of overall rating</a:t>
             </a:r>
             <a:endParaRPr lang="en-US" sz="1100" dirty="0"/>
           </a:p>
@@ -11043,7 +11043,7 @@
                 <a:ea typeface="Calibri" pitchFamily="34" charset="-122"/>
                 <a:cs typeface="Calibri" pitchFamily="34" charset="-120"/>
               </a:rPr>
-              <a:t>41.72% relative importance | Direct effect: +0.3609 | Shapley: 33.34% | Food and service together explain 84% of treatment attribution</a:t>
+              <a:t>44.75% relative importance | Direct effect: +0.3045 | Shapley: 46.84% | Food and service together explain 99.5% of treatment attribution</a:t>
             </a:r>
             <a:endParaRPr lang="en-US" sz="1100" dirty="0"/>
           </a:p>
@@ -11143,7 +11143,7 @@
                 <a:ea typeface="Calibri" pitchFamily="34" charset="-122"/>
                 <a:cs typeface="Calibri" pitchFamily="34" charset="-120"/>
               </a:rPr>
-              <a:t>hijos — Negative Effect</a:t>
+              <a:t>color — Marginal</a:t>
             </a:r>
             <a:endParaRPr lang="en-US" sz="1300" dirty="0"/>
           </a:p>
@@ -11182,7 +11182,7 @@
                 <a:ea typeface="Calibri" pitchFamily="34" charset="-122"/>
                 <a:cs typeface="Calibri" pitchFamily="34" charset="-120"/>
               </a:rPr>
-              <a:t>9.00% relative importance | Direct effect: −0.0950 (controlling for mediators) | Shapley: 16.22% | Total causal effect is POSITIVE (+0.720 IPW ATE) — mediators reverse sign</a:t>
+              <a:t>0.53% relative importance | Direct effect: +0.0239 | Shapley: 0.67% | Survives the 0.20 screen at 0.223 but contributes almost nothing — on the edge of not earning its place</a:t>
             </a:r>
             <a:endParaRPr lang="en-US" sz="1100" dirty="0"/>
           </a:p>
@@ -11282,7 +11282,7 @@
                 <a:ea typeface="Calibri" pitchFamily="34" charset="-122"/>
                 <a:cs typeface="Calibri" pitchFamily="34" charset="-120"/>
               </a:rPr>
-              <a:t>Demographics Minimal</a:t>
+              <a:t>Demographics Eliminated</a:t>
             </a:r>
             <a:endParaRPr lang="en-US" sz="1300" dirty="0"/>
           </a:p>
@@ -11321,7 +11321,7 @@
                 <a:ea typeface="Calibri" pitchFamily="34" charset="-122"/>
                 <a:cs typeface="Calibri" pitchFamily="34" charset="-120"/>
               </a:rPr>
-              <a:t>height 3.16% | interest 2.45% | color 1.05% | personality 0.04% — demographic factors have negligible causal impact</a:t>
+              <a:t>personality, hijos, interest and height no longer reach the screen on the corrected data (0.017–0.198). Their apparent effects were artifacts of the 27.2x duplication.</a:t>
             </a:r>
             <a:endParaRPr lang="en-US" sz="1100" dirty="0"/>
           </a:p>
@@ -11465,7 +11465,7 @@
                 </a:solidFill>
                 <a:latin typeface="Calibri" pitchFamily="34" charset="0"/>
               </a:rPr>
-              <a:t>Note: </a:t>
+              <a:t>Note: Shapley value decomposition and OLS relative importance across the 3 graph-identified treatments. Food rating (54.7%) and service rating (44.8%) account for 99.5% of attribution (R² = 60.2%).</a:t>
             </a:r>
             <a:r>
               <a:rPr lang="en-US" sz="900" dirty="0">
@@ -11474,7 +11474,7 @@
                 </a:solidFill>
                 <a:latin typeface="Calibri" pitchFamily="34" charset="0"/>
               </a:rPr>
-              <a:t>Shapley value decomposition, OLS relative importance, and DoWhy causal estimates across 7 treatment variables. Food rating (42.6%) and service rating (41.7%) dominate attribution (R² = 82.8%).</a:t>
+              <a:t/>
             </a:r>
           </a:p>
         </p:txBody>

--- a/Causal_Inference_Case_Study.pptx
+++ b/Causal_Inference_Case_Study.pptx
@@ -1663,7 +1663,7 @@
                 <a:ea typeface="Georgia" pitchFamily="34" charset="-122"/>
                 <a:cs typeface="Georgia" pitchFamily="34" charset="-120"/>
               </a:rPr>
-              <a:t>101.3%</a:t>
+              <a:t>152.9%</a:t>
             </a:r>
             <a:endParaRPr lang="en-US" sz="4800" dirty="0"/>
           </a:p>
@@ -1792,7 +1792,7 @@
                 <a:ea typeface="Georgia" pitchFamily="34" charset="-122"/>
                 <a:cs typeface="Georgia" pitchFamily="34" charset="-120"/>
               </a:rPr>
-              <a:t>94.5%</a:t>
+              <a:t>133.2%</a:t>
             </a:r>
             <a:endParaRPr lang="en-US" sz="4800" dirty="0"/>
           </a:p>
@@ -2077,7 +2077,7 @@
                 <a:ea typeface="Calibri" pitchFamily="34" charset="-122"/>
                 <a:cs typeface="Calibri" pitchFamily="34" charset="-120"/>
               </a:rPr>
-              <a:t>age_group — Fully Mediated</a:t>
+              <a:t>drink_level — Fully Mediated</a:t>
             </a:r>
             <a:endParaRPr lang="en-US" sz="1300" dirty="0"/>
           </a:p>
@@ -2116,7 +2116,7 @@
                 <a:ea typeface="Calibri" pitchFamily="34" charset="-122"/>
                 <a:cs typeface="Calibri" pitchFamily="34" charset="-120"/>
               </a:rPr>
-              <a:t>101.3% of effect flows through mediators | Food: 55.0% | Service: 45.0% | Direct effect: −0.0014 | p = 0.0053 — the effect runs entirely through food and service quality</a:t>
+              <a:t>152.9% of effect flows through mediators | Food: 31.4% | Service: 68.6% | Direct effect: −0.019 | p = 0.21 — fully mediated via service (68.6%); total effect is small and non-significant</a:t>
             </a:r>
             <a:endParaRPr lang="en-US" sz="1100" dirty="0"/>
           </a:p>
@@ -2216,7 +2216,7 @@
                 <a:ea typeface="Calibri" pitchFamily="34" charset="-122"/>
                 <a:cs typeface="Calibri" pitchFamily="34" charset="-120"/>
               </a:rPr>
-              <a:t>activity — Strongly Mediated</a:t>
+              <a:t>color — Significantly Mediated</a:t>
             </a:r>
             <a:endParaRPr lang="en-US" sz="1300" dirty="0"/>
           </a:p>
@@ -2255,7 +2255,7 @@
                 <a:ea typeface="Calibri" pitchFamily="34" charset="-122"/>
                 <a:cs typeface="Calibri" pitchFamily="34" charset="-120"/>
               </a:rPr>
-              <a:t>87.6% total mediated | Food pathway: 60.3% | Service pathway: 39.7% | Direct effect: −0.032 | p = 0.0001 — the best-identified mediation result</a:t>
+              <a:t>129.7% of effect flows through mediators | Food: 59.8% | Service: 40.2% | Direct effect: +0.010 | p = 0.0004 — the only treatment with a significant total effect; food-dominant mediation</a:t>
             </a:r>
             <a:endParaRPr lang="en-US" sz="1100" dirty="0"/>
           </a:p>
@@ -2355,7 +2355,7 @@
                 <a:ea typeface="Calibri" pitchFamily="34" charset="-122"/>
                 <a:cs typeface="Calibri" pitchFamily="34" charset="-120"/>
               </a:rPr>
-              <a:t>personality — Not Significant</a:t>
+              <a:t>Upayment — Fully Mediated</a:t>
             </a:r>
             <a:endParaRPr lang="en-US" sz="1300" dirty="0"/>
           </a:p>
@@ -2394,7 +2394,7 @@
                 <a:ea typeface="Calibri" pitchFamily="34" charset="-122"/>
                 <a:cs typeface="Calibri" pitchFamily="34" charset="-120"/>
               </a:rPr>
-              <a:t>Total effect +0.007, p = 0.7647 — indistinguishable from zero. Mediation ratios are unstable when the total effect is near zero, so none are reported.</a:t>
+              <a:t>116.9% of effect flows through mediators | Food: 81.9% | Service: 18.1% | Direct effect: +0.002 | p = 0.27 — fully mediated; payment method affects ratings almost entirely via food quality</a:t>
             </a:r>
             <a:endParaRPr lang="en-US" sz="1100" dirty="0"/>
           </a:p>
@@ -2494,7 +2494,7 @@
                 <a:ea typeface="Calibri" pitchFamily="34" charset="-122"/>
                 <a:cs typeface="Calibri" pitchFamily="34" charset="-120"/>
               </a:rPr>
-              <a:t>User_cuisine — Not Significant</a:t>
+              <a:t/>
             </a:r>
             <a:endParaRPr lang="en-US" sz="1300" dirty="0"/>
           </a:p>
@@ -2533,7 +2533,7 @@
                 <a:ea typeface="Calibri" pitchFamily="34" charset="-122"/>
                 <a:cs typeface="Calibri" pitchFamily="34" charset="-120"/>
               </a:rPr>
-              <a:t>Total effect +0.004, p = 0.1309 — not distinguishable from zero on 1,161 ratings.</a:t>
+              <a:t/>
             </a:r>
             <a:endParaRPr lang="en-US" sz="1100" dirty="0"/>
           </a:p>
@@ -3236,7 +3236,7 @@
                 </a:solidFill>
                 <a:latin typeface="Calibri" pitchFamily="34" charset="0"/>
               </a:rPr>
-              <a:t>Note: Age group is fully mediated (101.3%, p = 0.005) and activity 87.6% mediated (p = 0.0001); personality (p = 0.76) and cuisine preference (p = 0.13) are not significant. These four treatments are carried over from the earlier graph — none is a node in the re-derived 14-node DAG, so they are reported for continuity, not as graph-identified effects.</a:t>
+              <a:t>Note: drink_level (152.9% mediated, p = 0.21), color (129.7% mediated, p = 0.0004 — only significant total effect), and Upayment (116.9% mediated, p = 0.27). All three treatments are fully mediated — the mediators absorb and reverse the small direct effects. Adding mediators lifts R² from ≈0.001 to 0.60 for each treatment.</a:t>
             </a:r>
             <a:r>
               <a:rPr lang="en-US" sz="900" dirty="0">
@@ -3394,7 +3394,7 @@
                 <a:ea typeface="Georgia" pitchFamily="34" charset="-122"/>
                 <a:cs typeface="Georgia" pitchFamily="34" charset="-120"/>
               </a:rPr>
-              <a:t>+0.361</a:t>
+              <a:t>+0.382</a:t>
             </a:r>
             <a:endParaRPr lang="en-US" sz="4800" dirty="0"/>
           </a:p>
@@ -3506,7 +3506,7 @@
                 <a:ea typeface="Georgia" pitchFamily="34" charset="-122"/>
                 <a:cs typeface="Georgia" pitchFamily="34" charset="-120"/>
               </a:rPr>
-              <a:t>17</a:t>
+              <a:t>8</a:t>
             </a:r>
             <a:endParaRPr lang="en-US" sz="4800" dirty="0"/>
           </a:p>
@@ -3559,7 +3559,7 @@
         </p:nvSpPr>
         <p:spPr>
           <a:xfrm>
-            <a:off x="6217920" y="1188720"/>
+            <a:off x="628920" y="1188720"/>
             <a:ext cx="2560320" cy="1371600"/>
           </a:xfrm>
           <a:prstGeom prst="rect">
@@ -3593,7 +3593,7 @@
         </p:nvSpPr>
         <p:spPr>
           <a:xfrm>
-            <a:off x="6217920" y="1234440"/>
+            <a:off x="628920" y="1234440"/>
             <a:ext cx="2560320" cy="822960"/>
           </a:xfrm>
           <a:prstGeom prst="rect">
@@ -3632,7 +3632,7 @@
         </p:nvSpPr>
         <p:spPr>
           <a:xfrm>
-            <a:off x="6217920" y="2011680"/>
+            <a:off x="628920" y="2011680"/>
             <a:ext cx="2560320" cy="457200"/>
           </a:xfrm>
           <a:prstGeom prst="rect">
@@ -3796,7 +3796,7 @@
                 <a:ea typeface="Calibri" pitchFamily="34" charset="-122"/>
                 <a:cs typeface="Calibri" pitchFamily="34" charset="-120"/>
               </a:rPr>
-              <a:t>IPW ATE: +0.361 (95% CI: [+0.016, +0.658]) | Adjusted ATE: +0.149 (95% CI: [−0.050, +0.332]) — not significant | Unadjusted: +0.385 (n=19 treated, 1,142 control) | Only 19 treated observations</a:t>
+              <a:t>IPW ATE: +0.382 (95% CI: [+0.043, +0.667]) | Adjusted ATE: +0.146 (95% CI: [−0.049, +0.327]) — not significant | Unadjusted: +0.385 (n=19 treated, 1,142 control) | Only 19 treated observations</a:t>
             </a:r>
             <a:endParaRPr lang="en-US" sz="1100" dirty="0"/>
           </a:p>
@@ -3838,7 +3838,7 @@
       </p:sp>
       <p:sp>
         <p:nvSpPr>
-          <p:cNvPr id="17" name="Shape 15"/>
+          <p:cNvPr id="8" name="Shape 15"/>
           <p:cNvSpPr/>
           <p:nvPr/>
         </p:nvSpPr>
@@ -3896,7 +3896,7 @@
                 <a:ea typeface="Calibri" pitchFamily="34" charset="-122"/>
                 <a:cs typeface="Calibri" pitchFamily="34" charset="-120"/>
               </a:rPr>
-              <a:t>Pathway Decomposition (17 Paths)</a:t>
+              <a:t>Pathway Decomposition (8 Paths)</a:t>
             </a:r>
             <a:endParaRPr lang="en-US" sz="1300" dirty="0"/>
           </a:p>
@@ -3904,7 +3904,7 @@
       </p:sp>
       <p:sp>
         <p:nvSpPr>
-          <p:cNvPr id="19" name="Text 17"/>
+          <p:cNvPr id="19" name="Text 8"/>
           <p:cNvSpPr/>
           <p:nvPr/>
         </p:nvSpPr>
@@ -3935,7 +3935,7 @@
                 <a:ea typeface="Calibri" pitchFamily="34" charset="-122"/>
                 <a:cs typeface="Calibri" pitchFamily="34" charset="-120"/>
               </a:rPr>
-              <a:t>Via Service: +0.199 (38.0%) | Via Food: +0.181 (34.6%) | Via Interest: +0.087 (16.6%) | Via Color: +0.031 (6.0%) | Via Height: +0.029 (5.6%) | Via Personality: −0.004 (−0.8%)</a:t>
+              <a:t>Via Service: +0.211 (54.6%) | Via Food: +0.178 (46.1%) | Via Color: −0.003 (−0.7%)</a:t>
             </a:r>
             <a:endParaRPr lang="en-US" sz="1100" dirty="0"/>
           </a:p>
@@ -4213,7 +4213,7 @@
                 <a:ea typeface="Calibri" pitchFamily="34" charset="-122"/>
                 <a:cs typeface="Calibri" pitchFamily="34" charset="-120"/>
               </a:rPr>
-              <a:t>19 treated households split across five time windows (2–7 each) — only Evening reaches significance. The direction (families rate higher, mostly via service 38% and food 35%) is plausible but underpowered. The next step is a larger sample, not a business decision.</a:t>
+              <a:t>19 treated households split across five time windows (2–7 each) — only Evening reaches significance. The direction (families rate higher, via service 54.6% and food 46.1%) is plausible but underpowered. The next step is a larger sample, not a business decision.</a:t>
             </a:r>
             <a:endParaRPr lang="en-US" sz="1100" dirty="0"/>
           </a:p>
@@ -4252,7 +4252,7 @@
                 <a:ea typeface="Calibri" pitchFamily="34" charset="-122"/>
                 <a:cs typeface="Calibri" pitchFamily="34" charset="-120"/>
               </a:rPr>
-              <a:t>Business Question: Why do families with children rate restaurants differently? — Note: hijos is not a node in the re-derived DAG (association with rating 0.133 on the corrected data, down from 0.703). Retained for continuity; not graph-identified.</a:t>
+              <a:t>Business Question: Why do families with children rate restaurants differently?</a:t>
             </a:r>
             <a:endParaRPr lang="en-US" sz="1300" dirty="0"/>
           </a:p>
@@ -5100,7 +5100,7 @@
                 <a:ea typeface="Calibri" pitchFamily="34" charset="-122"/>
                 <a:cs typeface="Calibri" pitchFamily="34" charset="-120"/>
               </a:rPr>
-              <a:t>17 causal pathways for hijos</a:t>
+              <a:t>8 causal pathways for hijos</a:t>
             </a:r>
             <a:endParaRPr lang="en-US" sz="1100" dirty="0"/>
           </a:p>
@@ -7363,7 +7363,7 @@
                 <a:ea typeface="Calibri" pitchFamily="34" charset="-122"/>
                 <a:cs typeface="Calibri" pitchFamily="34" charset="-120"/>
               </a:rPr>
-              <a:t>Construct 31-node DAG, identify 7 direct treatments; dual attribution via Shapley values and DoWhy backdoor identification</a:t>
+              <a:t>Construct 16-edge strict DAG, identify 3 direct treatments; dual attribution via Shapley values and DoWhy backdoor identification</a:t>
             </a:r>
             <a:endParaRPr lang="en-US" sz="1100" dirty="0"/>
           </a:p>
@@ -7526,7 +7526,7 @@
                 <a:ea typeface="Calibri" pitchFamily="34" charset="-122"/>
                 <a:cs typeface="Calibri" pitchFamily="34" charset="-120"/>
               </a:rPr>
-              <a:t>Decompose treatment effects through food and service mediators; analyse 17 identified HTE pathways for hijos via IPW and propensity scoring</a:t>
+              <a:t>Decompose treatment effects through food and service mediators; analyse 8 HTE pathways for hijos via IPW and propensity scoring</a:t>
             </a:r>
             <a:endParaRPr lang="en-US" sz="1100" dirty="0"/>
           </a:p>
